--- a/fixtures/sample-animation-effects.pptx
+++ b/fixtures/sample-animation-effects.pptx
@@ -11,6 +11,7 @@
     <p:sldId id="259" r:id="rId5"/>
     <p:sldId id="260" r:id="rId6"/>
     <p:sldId id="261" r:id="rId7"/>
+    <p:sldId id="262" r:id="rId8"/>
   </p:sldIdLst>
   <p:sldSz cx="12192000" cy="6858000"/>
   <p:notesSz cx="6858000" cy="9144000"/>
@@ -2595,6 +2596,1051 @@
                             </p:tgtEl>
                           </p:cBhvr>
                         </p:animEffect>
+                      </p:childTnLst>
+                    </p:cTn>
+                  </p:par>
+                </p:childTnLst>
+              </p:cTn>
+            </p:seq>
+          </p:childTnLst>
+        </p:cTn>
+      </p:par>
+    </p:tnLst>
+  </p:timing>
+</p:sld>
+</file>
+
+<file path=ppt/slides/slide7.xml><?xml version="1.0" encoding="utf-8"?>
+<p:sld xmlns:a="http://schemas.openxmlformats.org/drawingml/2006/main" xmlns:r="http://schemas.openxmlformats.org/officeDocument/2006/relationships" xmlns:p="http://schemas.openxmlformats.org/presentationml/2006/main">
+  <p:cSld>
+    <p:spTree>
+      <p:nvGrpSpPr>
+        <p:cNvPr id="1" name=""/>
+        <p:cNvGrpSpPr/>
+        <p:nvPr/>
+      </p:nvGrpSpPr>
+      <p:grpSpPr>
+        <a:xfrm>
+          <a:off x="0" y="0"/>
+          <a:ext cx="0" cy="0"/>
+          <a:chOff x="0" y="0"/>
+          <a:chExt cx="0" cy="0"/>
+        </a:xfrm>
+      </p:grpSpPr>
+      <p:sp>
+        <p:nvSpPr>
+          <p:cNvPr id="145" name="stretch-across"/>
+          <p:cNvSpPr/>
+          <p:nvPr/>
+        </p:nvSpPr>
+        <p:spPr>
+          <a:xfrm>
+            <a:off x="428625" y="952500"/>
+            <a:ext cx="2190750" cy="1333500"/>
+          </a:xfrm>
+          <a:prstGeom prst="rect">
+            <a:avLst/>
+          </a:prstGeom>
+          <a:solidFill>
+            <a:srgbClr val="4472C4"/>
+          </a:solidFill>
+        </p:spPr>
+        <p:txBody>
+          <a:bodyPr anchor="ctr"/>
+          <a:lstStyle/>
+          <a:p>
+            <a:pPr algn="ctr"/>
+            <a:r>
+              <a:rPr sz="2200">
+                <a:solidFill>
+                  <a:srgbClr val="FFFFFF"/>
+                </a:solidFill>
+              </a:rPr>
+              <a:t>stretch-across</a:t>
+            </a:r>
+          </a:p>
+        </p:txBody>
+      </p:sp>
+      <p:sp>
+        <p:nvSpPr>
+          <p:cNvPr id="146" name="stretch-bottom"/>
+          <p:cNvSpPr/>
+          <p:nvPr/>
+        </p:nvSpPr>
+        <p:spPr>
+          <a:xfrm>
+            <a:off x="3286125" y="952500"/>
+            <a:ext cx="2190750" cy="1333500"/>
+          </a:xfrm>
+          <a:prstGeom prst="rect">
+            <a:avLst/>
+          </a:prstGeom>
+          <a:solidFill>
+            <a:srgbClr val="4472C4"/>
+          </a:solidFill>
+        </p:spPr>
+        <p:txBody>
+          <a:bodyPr anchor="ctr"/>
+          <a:lstStyle/>
+          <a:p>
+            <a:pPr algn="ctr"/>
+            <a:r>
+              <a:rPr sz="2200">
+                <a:solidFill>
+                  <a:srgbClr val="FFFFFF"/>
+                </a:solidFill>
+              </a:rPr>
+              <a:t>stretch-bottom</a:t>
+            </a:r>
+          </a:p>
+        </p:txBody>
+      </p:sp>
+      <p:sp>
+        <p:nvSpPr>
+          <p:cNvPr id="147" name="stretch-left"/>
+          <p:cNvSpPr/>
+          <p:nvPr/>
+        </p:nvSpPr>
+        <p:spPr>
+          <a:xfrm>
+            <a:off x="6143625" y="952500"/>
+            <a:ext cx="2190750" cy="1333500"/>
+          </a:xfrm>
+          <a:prstGeom prst="rect">
+            <a:avLst/>
+          </a:prstGeom>
+          <a:solidFill>
+            <a:srgbClr val="4472C4"/>
+          </a:solidFill>
+        </p:spPr>
+        <p:txBody>
+          <a:bodyPr anchor="ctr"/>
+          <a:lstStyle/>
+          <a:p>
+            <a:pPr algn="ctr"/>
+            <a:r>
+              <a:rPr sz="2200">
+                <a:solidFill>
+                  <a:srgbClr val="FFFFFF"/>
+                </a:solidFill>
+              </a:rPr>
+              <a:t>stretch-left</a:t>
+            </a:r>
+          </a:p>
+        </p:txBody>
+      </p:sp>
+      <p:sp>
+        <p:nvSpPr>
+          <p:cNvPr id="148" name="stretch-top"/>
+          <p:cNvSpPr/>
+          <p:nvPr/>
+        </p:nvSpPr>
+        <p:spPr>
+          <a:xfrm>
+            <a:off x="9001125" y="952500"/>
+            <a:ext cx="2190750" cy="1333500"/>
+          </a:xfrm>
+          <a:prstGeom prst="rect">
+            <a:avLst/>
+          </a:prstGeom>
+          <a:solidFill>
+            <a:srgbClr val="4472C4"/>
+          </a:solidFill>
+        </p:spPr>
+        <p:txBody>
+          <a:bodyPr anchor="ctr"/>
+          <a:lstStyle/>
+          <a:p>
+            <a:pPr algn="ctr"/>
+            <a:r>
+              <a:rPr sz="2200">
+                <a:solidFill>
+                  <a:srgbClr val="FFFFFF"/>
+                </a:solidFill>
+              </a:rPr>
+              <a:t>stretch-top</a:t>
+            </a:r>
+          </a:p>
+        </p:txBody>
+      </p:sp>
+      <p:sp>
+        <p:nvSpPr>
+          <p:cNvPr id="149" name="stretch-right"/>
+          <p:cNvSpPr/>
+          <p:nvPr/>
+        </p:nvSpPr>
+        <p:spPr>
+          <a:xfrm>
+            <a:off x="428625" y="3905250"/>
+            <a:ext cx="2190750" cy="1333500"/>
+          </a:xfrm>
+          <a:prstGeom prst="rect">
+            <a:avLst/>
+          </a:prstGeom>
+          <a:solidFill>
+            <a:srgbClr val="4472C4"/>
+          </a:solidFill>
+        </p:spPr>
+        <p:txBody>
+          <a:bodyPr anchor="ctr"/>
+          <a:lstStyle/>
+          <a:p>
+            <a:pPr algn="ctr"/>
+            <a:r>
+              <a:rPr sz="2200">
+                <a:solidFill>
+                  <a:srgbClr val="FFFFFF"/>
+                </a:solidFill>
+              </a:rPr>
+              <a:t>stretch-right</a:t>
+            </a:r>
+          </a:p>
+        </p:txBody>
+      </p:sp>
+      <p:sp>
+        <p:nvSpPr>
+          <p:cNvPr id="150" name="swivel-vert"/>
+          <p:cNvSpPr/>
+          <p:nvPr/>
+        </p:nvSpPr>
+        <p:spPr>
+          <a:xfrm>
+            <a:off x="3286125" y="3905250"/>
+            <a:ext cx="2190750" cy="1333500"/>
+          </a:xfrm>
+          <a:prstGeom prst="rect">
+            <a:avLst/>
+          </a:prstGeom>
+          <a:solidFill>
+            <a:srgbClr val="4472C4"/>
+          </a:solidFill>
+        </p:spPr>
+        <p:txBody>
+          <a:bodyPr anchor="ctr"/>
+          <a:lstStyle/>
+          <a:p>
+            <a:pPr algn="ctr"/>
+            <a:r>
+              <a:rPr sz="2200">
+                <a:solidFill>
+                  <a:srgbClr val="FFFFFF"/>
+                </a:solidFill>
+              </a:rPr>
+              <a:t>swivel-vert</a:t>
+            </a:r>
+          </a:p>
+        </p:txBody>
+      </p:sp>
+      <p:sp>
+        <p:nvSpPr>
+          <p:cNvPr id="151" name="swivel-horz"/>
+          <p:cNvSpPr/>
+          <p:nvPr/>
+        </p:nvSpPr>
+        <p:spPr>
+          <a:xfrm>
+            <a:off x="6143625" y="3905250"/>
+            <a:ext cx="2190750" cy="1333500"/>
+          </a:xfrm>
+          <a:prstGeom prst="rect">
+            <a:avLst/>
+          </a:prstGeom>
+          <a:solidFill>
+            <a:srgbClr val="4472C4"/>
+          </a:solidFill>
+        </p:spPr>
+        <p:txBody>
+          <a:bodyPr anchor="ctr"/>
+          <a:lstStyle/>
+          <a:p>
+            <a:pPr algn="ctr"/>
+            <a:r>
+              <a:rPr sz="2200">
+                <a:solidFill>
+                  <a:srgbClr val="FFFFFF"/>
+                </a:solidFill>
+              </a:rPr>
+              <a:t>swivel-horz</a:t>
+            </a:r>
+          </a:p>
+        </p:txBody>
+      </p:sp>
+      <p:sp>
+        <p:nvSpPr>
+          <p:cNvPr id="152" name="exit-stretch-bottom"/>
+          <p:cNvSpPr/>
+          <p:nvPr/>
+        </p:nvSpPr>
+        <p:spPr>
+          <a:xfrm>
+            <a:off x="9001125" y="3905250"/>
+            <a:ext cx="2190750" cy="1333500"/>
+          </a:xfrm>
+          <a:prstGeom prst="rect">
+            <a:avLst/>
+          </a:prstGeom>
+          <a:solidFill>
+            <a:srgbClr val="4472C4"/>
+          </a:solidFill>
+        </p:spPr>
+        <p:txBody>
+          <a:bodyPr anchor="ctr"/>
+          <a:lstStyle/>
+          <a:p>
+            <a:pPr algn="ctr"/>
+            <a:r>
+              <a:rPr sz="2200">
+                <a:solidFill>
+                  <a:srgbClr val="FFFFFF"/>
+                </a:solidFill>
+              </a:rPr>
+              <a:t>exit-stretch-bottom</a:t>
+            </a:r>
+          </a:p>
+        </p:txBody>
+      </p:sp>
+    </p:spTree>
+  </p:cSld>
+  <p:clrMapOvr>
+    <a:masterClrMapping/>
+  </p:clrMapOvr>
+  <p:timing>
+    <p:tnLst>
+      <p:par>
+        <p:cTn id="1" dur="indefinite" nodeType="tmRoot">
+          <p:childTnLst>
+            <p:seq>
+              <p:cTn id="2" dur="indefinite" nodeType="mainSeq">
+                <p:childTnLst>
+                  <p:par>
+                    <p:cTn id="10" presetID="17" presetSubtype="10" presetClass="entr" nodeType="clickEffect" dur="1200" fill="hold">
+                      <p:stCondLst>
+                        <p:cond delay="0"/>
+                      </p:stCondLst>
+                      <p:childTnLst>
+                        <p:anim calcmode="lin" valueType="num">
+                          <p:cBhvr>
+                            <p:cTn id="200" dur="1200" fill="hold"/>
+                            <p:tgtEl>
+                              <p:spTgt spid="145"/>
+                            </p:tgtEl>
+                            <p:attrNameLst>
+                              <p:attrName>ppt_x</p:attrName>
+                            </p:attrNameLst>
+                          </p:cBhvr>
+                          <p:tavLst>
+                            <p:tav tm="0">
+                              <p:val>
+                                <p:strVal val="#ppt_x"/>
+                              </p:val>
+                            </p:tav>
+                            <p:tav tm="100000">
+                              <p:val>
+                                <p:strVal val="#ppt_x"/>
+                              </p:val>
+                            </p:tav>
+                          </p:tavLst>
+                        </p:anim>
+                        <p:anim calcmode="lin" valueType="num">
+                          <p:cBhvr>
+                            <p:cTn id="201" dur="1200" fill="hold"/>
+                            <p:tgtEl>
+                              <p:spTgt spid="145"/>
+                            </p:tgtEl>
+                            <p:attrNameLst>
+                              <p:attrName>ppt_y</p:attrName>
+                            </p:attrNameLst>
+                          </p:cBhvr>
+                          <p:tavLst>
+                            <p:tav tm="0">
+                              <p:val>
+                                <p:strVal val="#ppt_y"/>
+                              </p:val>
+                            </p:tav>
+                            <p:tav tm="100000">
+                              <p:val>
+                                <p:strVal val="#ppt_y"/>
+                              </p:val>
+                            </p:tav>
+                          </p:tavLst>
+                        </p:anim>
+                        <p:anim calcmode="lin" valueType="num">
+                          <p:cBhvr>
+                            <p:cTn id="202" dur="1200" fill="hold"/>
+                            <p:tgtEl>
+                              <p:spTgt spid="145"/>
+                            </p:tgtEl>
+                            <p:attrNameLst>
+                              <p:attrName>ppt_w</p:attrName>
+                            </p:attrNameLst>
+                          </p:cBhvr>
+                          <p:tavLst>
+                            <p:tav tm="0">
+                              <p:val>
+                                <p:fltVal val="0"/>
+                              </p:val>
+                            </p:tav>
+                            <p:tav tm="100000">
+                              <p:val>
+                                <p:strVal val="#ppt_w"/>
+                              </p:val>
+                            </p:tav>
+                          </p:tavLst>
+                        </p:anim>
+                        <p:anim calcmode="lin" valueType="num">
+                          <p:cBhvr>
+                            <p:cTn id="203" dur="1200" fill="hold"/>
+                            <p:tgtEl>
+                              <p:spTgt spid="145"/>
+                            </p:tgtEl>
+                            <p:attrNameLst>
+                              <p:attrName>ppt_h</p:attrName>
+                            </p:attrNameLst>
+                          </p:cBhvr>
+                          <p:tavLst>
+                            <p:tav tm="0">
+                              <p:val>
+                                <p:strVal val="#ppt_h"/>
+                              </p:val>
+                            </p:tav>
+                            <p:tav tm="100000">
+                              <p:val>
+                                <p:strVal val="#ppt_h"/>
+                              </p:val>
+                            </p:tav>
+                          </p:tavLst>
+                        </p:anim>
+                      </p:childTnLst>
+                    </p:cTn>
+                  </p:par>
+                  <p:par>
+                    <p:cTn id="11" presetID="17" presetSubtype="4" presetClass="entr" nodeType="clickEffect" dur="1200" fill="hold">
+                      <p:stCondLst>
+                        <p:cond delay="0"/>
+                      </p:stCondLst>
+                      <p:childTnLst>
+                        <p:anim calcmode="lin" valueType="num">
+                          <p:cBhvr>
+                            <p:cTn id="210" dur="1200" fill="hold"/>
+                            <p:tgtEl>
+                              <p:spTgt spid="146"/>
+                            </p:tgtEl>
+                            <p:attrNameLst>
+                              <p:attrName>ppt_x</p:attrName>
+                            </p:attrNameLst>
+                          </p:cBhvr>
+                          <p:tavLst>
+                            <p:tav tm="0">
+                              <p:val>
+                                <p:strVal val="#ppt_x"/>
+                              </p:val>
+                            </p:tav>
+                            <p:tav tm="100000">
+                              <p:val>
+                                <p:strVal val="#ppt_x"/>
+                              </p:val>
+                            </p:tav>
+                          </p:tavLst>
+                        </p:anim>
+                        <p:anim calcmode="lin" valueType="num">
+                          <p:cBhvr>
+                            <p:cTn id="211" dur="1200" fill="hold"/>
+                            <p:tgtEl>
+                              <p:spTgt spid="146"/>
+                            </p:tgtEl>
+                            <p:attrNameLst>
+                              <p:attrName>ppt_y</p:attrName>
+                            </p:attrNameLst>
+                          </p:cBhvr>
+                          <p:tavLst>
+                            <p:tav tm="0">
+                              <p:val>
+                                <p:strVal val="#ppt_y+#ppt_h/2"/>
+                              </p:val>
+                            </p:tav>
+                            <p:tav tm="100000">
+                              <p:val>
+                                <p:strVal val="#ppt_y"/>
+                              </p:val>
+                            </p:tav>
+                          </p:tavLst>
+                        </p:anim>
+                        <p:anim calcmode="lin" valueType="num">
+                          <p:cBhvr>
+                            <p:cTn id="212" dur="1200" fill="hold"/>
+                            <p:tgtEl>
+                              <p:spTgt spid="146"/>
+                            </p:tgtEl>
+                            <p:attrNameLst>
+                              <p:attrName>ppt_w</p:attrName>
+                            </p:attrNameLst>
+                          </p:cBhvr>
+                          <p:tavLst>
+                            <p:tav tm="0">
+                              <p:val>
+                                <p:strVal val="#ppt_w"/>
+                              </p:val>
+                            </p:tav>
+                            <p:tav tm="100000">
+                              <p:val>
+                                <p:strVal val="#ppt_w"/>
+                              </p:val>
+                            </p:tav>
+                          </p:tavLst>
+                        </p:anim>
+                        <p:anim calcmode="lin" valueType="num">
+                          <p:cBhvr>
+                            <p:cTn id="213" dur="1200" fill="hold"/>
+                            <p:tgtEl>
+                              <p:spTgt spid="146"/>
+                            </p:tgtEl>
+                            <p:attrNameLst>
+                              <p:attrName>ppt_h</p:attrName>
+                            </p:attrNameLst>
+                          </p:cBhvr>
+                          <p:tavLst>
+                            <p:tav tm="0">
+                              <p:val>
+                                <p:fltVal val="0"/>
+                              </p:val>
+                            </p:tav>
+                            <p:tav tm="100000">
+                              <p:val>
+                                <p:strVal val="#ppt_h"/>
+                              </p:val>
+                            </p:tav>
+                          </p:tavLst>
+                        </p:anim>
+                      </p:childTnLst>
+                    </p:cTn>
+                  </p:par>
+                  <p:par>
+                    <p:cTn id="12" presetID="17" presetSubtype="8" presetClass="entr" nodeType="clickEffect" dur="1200" fill="hold">
+                      <p:stCondLst>
+                        <p:cond delay="0"/>
+                      </p:stCondLst>
+                      <p:childTnLst>
+                        <p:anim calcmode="lin" valueType="num">
+                          <p:cBhvr>
+                            <p:cTn id="220" dur="1200" fill="hold"/>
+                            <p:tgtEl>
+                              <p:spTgt spid="147"/>
+                            </p:tgtEl>
+                            <p:attrNameLst>
+                              <p:attrName>ppt_x</p:attrName>
+                            </p:attrNameLst>
+                          </p:cBhvr>
+                          <p:tavLst>
+                            <p:tav tm="0">
+                              <p:val>
+                                <p:strVal val="#ppt_x-#ppt_w/2"/>
+                              </p:val>
+                            </p:tav>
+                            <p:tav tm="100000">
+                              <p:val>
+                                <p:strVal val="#ppt_x"/>
+                              </p:val>
+                            </p:tav>
+                          </p:tavLst>
+                        </p:anim>
+                        <p:anim calcmode="lin" valueType="num">
+                          <p:cBhvr>
+                            <p:cTn id="221" dur="1200" fill="hold"/>
+                            <p:tgtEl>
+                              <p:spTgt spid="147"/>
+                            </p:tgtEl>
+                            <p:attrNameLst>
+                              <p:attrName>ppt_y</p:attrName>
+                            </p:attrNameLst>
+                          </p:cBhvr>
+                          <p:tavLst>
+                            <p:tav tm="0">
+                              <p:val>
+                                <p:strVal val="#ppt_y"/>
+                              </p:val>
+                            </p:tav>
+                            <p:tav tm="100000">
+                              <p:val>
+                                <p:strVal val="#ppt_y"/>
+                              </p:val>
+                            </p:tav>
+                          </p:tavLst>
+                        </p:anim>
+                        <p:anim calcmode="lin" valueType="num">
+                          <p:cBhvr>
+                            <p:cTn id="222" dur="1200" fill="hold"/>
+                            <p:tgtEl>
+                              <p:spTgt spid="147"/>
+                            </p:tgtEl>
+                            <p:attrNameLst>
+                              <p:attrName>ppt_w</p:attrName>
+                            </p:attrNameLst>
+                          </p:cBhvr>
+                          <p:tavLst>
+                            <p:tav tm="0">
+                              <p:val>
+                                <p:fltVal val="0"/>
+                              </p:val>
+                            </p:tav>
+                            <p:tav tm="100000">
+                              <p:val>
+                                <p:strVal val="#ppt_w"/>
+                              </p:val>
+                            </p:tav>
+                          </p:tavLst>
+                        </p:anim>
+                        <p:anim calcmode="lin" valueType="num">
+                          <p:cBhvr>
+                            <p:cTn id="223" dur="1200" fill="hold"/>
+                            <p:tgtEl>
+                              <p:spTgt spid="147"/>
+                            </p:tgtEl>
+                            <p:attrNameLst>
+                              <p:attrName>ppt_h</p:attrName>
+                            </p:attrNameLst>
+                          </p:cBhvr>
+                          <p:tavLst>
+                            <p:tav tm="0">
+                              <p:val>
+                                <p:strVal val="#ppt_h"/>
+                              </p:val>
+                            </p:tav>
+                            <p:tav tm="100000">
+                              <p:val>
+                                <p:strVal val="#ppt_h"/>
+                              </p:val>
+                            </p:tav>
+                          </p:tavLst>
+                        </p:anim>
+                      </p:childTnLst>
+                    </p:cTn>
+                  </p:par>
+                  <p:par>
+                    <p:cTn id="13" presetID="17" presetSubtype="1" presetClass="entr" nodeType="clickEffect" dur="1200" fill="hold">
+                      <p:stCondLst>
+                        <p:cond delay="0"/>
+                      </p:stCondLst>
+                      <p:childTnLst>
+                        <p:anim calcmode="lin" valueType="num">
+                          <p:cBhvr>
+                            <p:cTn id="230" dur="1200" fill="hold"/>
+                            <p:tgtEl>
+                              <p:spTgt spid="148"/>
+                            </p:tgtEl>
+                            <p:attrNameLst>
+                              <p:attrName>ppt_x</p:attrName>
+                            </p:attrNameLst>
+                          </p:cBhvr>
+                          <p:tavLst>
+                            <p:tav tm="0">
+                              <p:val>
+                                <p:strVal val="#ppt_x"/>
+                              </p:val>
+                            </p:tav>
+                            <p:tav tm="100000">
+                              <p:val>
+                                <p:strVal val="#ppt_x"/>
+                              </p:val>
+                            </p:tav>
+                          </p:tavLst>
+                        </p:anim>
+                        <p:anim calcmode="lin" valueType="num">
+                          <p:cBhvr>
+                            <p:cTn id="231" dur="1200" fill="hold"/>
+                            <p:tgtEl>
+                              <p:spTgt spid="148"/>
+                            </p:tgtEl>
+                            <p:attrNameLst>
+                              <p:attrName>ppt_y</p:attrName>
+                            </p:attrNameLst>
+                          </p:cBhvr>
+                          <p:tavLst>
+                            <p:tav tm="0">
+                              <p:val>
+                                <p:strVal val="#ppt_y-#ppt_h/2"/>
+                              </p:val>
+                            </p:tav>
+                            <p:tav tm="100000">
+                              <p:val>
+                                <p:strVal val="#ppt_y"/>
+                              </p:val>
+                            </p:tav>
+                          </p:tavLst>
+                        </p:anim>
+                        <p:anim calcmode="lin" valueType="num">
+                          <p:cBhvr>
+                            <p:cTn id="232" dur="1200" fill="hold"/>
+                            <p:tgtEl>
+                              <p:spTgt spid="148"/>
+                            </p:tgtEl>
+                            <p:attrNameLst>
+                              <p:attrName>ppt_w</p:attrName>
+                            </p:attrNameLst>
+                          </p:cBhvr>
+                          <p:tavLst>
+                            <p:tav tm="0">
+                              <p:val>
+                                <p:strVal val="#ppt_w"/>
+                              </p:val>
+                            </p:tav>
+                            <p:tav tm="100000">
+                              <p:val>
+                                <p:strVal val="#ppt_w"/>
+                              </p:val>
+                            </p:tav>
+                          </p:tavLst>
+                        </p:anim>
+                        <p:anim calcmode="lin" valueType="num">
+                          <p:cBhvr>
+                            <p:cTn id="233" dur="1200" fill="hold"/>
+                            <p:tgtEl>
+                              <p:spTgt spid="148"/>
+                            </p:tgtEl>
+                            <p:attrNameLst>
+                              <p:attrName>ppt_h</p:attrName>
+                            </p:attrNameLst>
+                          </p:cBhvr>
+                          <p:tavLst>
+                            <p:tav tm="0">
+                              <p:val>
+                                <p:fltVal val="0"/>
+                              </p:val>
+                            </p:tav>
+                            <p:tav tm="100000">
+                              <p:val>
+                                <p:strVal val="#ppt_h"/>
+                              </p:val>
+                            </p:tav>
+                          </p:tavLst>
+                        </p:anim>
+                      </p:childTnLst>
+                    </p:cTn>
+                  </p:par>
+                  <p:par>
+                    <p:cTn id="14" presetID="17" presetSubtype="2" presetClass="entr" nodeType="clickEffect" dur="1200" fill="hold">
+                      <p:stCondLst>
+                        <p:cond delay="0"/>
+                      </p:stCondLst>
+                      <p:childTnLst>
+                        <p:anim calcmode="lin" valueType="num">
+                          <p:cBhvr>
+                            <p:cTn id="240" dur="1200" fill="hold"/>
+                            <p:tgtEl>
+                              <p:spTgt spid="149"/>
+                            </p:tgtEl>
+                            <p:attrNameLst>
+                              <p:attrName>ppt_x</p:attrName>
+                            </p:attrNameLst>
+                          </p:cBhvr>
+                          <p:tavLst>
+                            <p:tav tm="0">
+                              <p:val>
+                                <p:strVal val="#ppt_x+#ppt_w/2"/>
+                              </p:val>
+                            </p:tav>
+                            <p:tav tm="100000">
+                              <p:val>
+                                <p:strVal val="#ppt_x"/>
+                              </p:val>
+                            </p:tav>
+                          </p:tavLst>
+                        </p:anim>
+                        <p:anim calcmode="lin" valueType="num">
+                          <p:cBhvr>
+                            <p:cTn id="241" dur="1200" fill="hold"/>
+                            <p:tgtEl>
+                              <p:spTgt spid="149"/>
+                            </p:tgtEl>
+                            <p:attrNameLst>
+                              <p:attrName>ppt_y</p:attrName>
+                            </p:attrNameLst>
+                          </p:cBhvr>
+                          <p:tavLst>
+                            <p:tav tm="0">
+                              <p:val>
+                                <p:strVal val="#ppt_y"/>
+                              </p:val>
+                            </p:tav>
+                            <p:tav tm="100000">
+                              <p:val>
+                                <p:strVal val="#ppt_y"/>
+                              </p:val>
+                            </p:tav>
+                          </p:tavLst>
+                        </p:anim>
+                        <p:anim calcmode="lin" valueType="num">
+                          <p:cBhvr>
+                            <p:cTn id="242" dur="1200" fill="hold"/>
+                            <p:tgtEl>
+                              <p:spTgt spid="149"/>
+                            </p:tgtEl>
+                            <p:attrNameLst>
+                              <p:attrName>ppt_w</p:attrName>
+                            </p:attrNameLst>
+                          </p:cBhvr>
+                          <p:tavLst>
+                            <p:tav tm="0">
+                              <p:val>
+                                <p:fltVal val="0"/>
+                              </p:val>
+                            </p:tav>
+                            <p:tav tm="100000">
+                              <p:val>
+                                <p:strVal val="#ppt_w"/>
+                              </p:val>
+                            </p:tav>
+                          </p:tavLst>
+                        </p:anim>
+                        <p:anim calcmode="lin" valueType="num">
+                          <p:cBhvr>
+                            <p:cTn id="243" dur="1200" fill="hold"/>
+                            <p:tgtEl>
+                              <p:spTgt spid="149"/>
+                            </p:tgtEl>
+                            <p:attrNameLst>
+                              <p:attrName>ppt_h</p:attrName>
+                            </p:attrNameLst>
+                          </p:cBhvr>
+                          <p:tavLst>
+                            <p:tav tm="0">
+                              <p:val>
+                                <p:strVal val="#ppt_h"/>
+                              </p:val>
+                            </p:tav>
+                            <p:tav tm="100000">
+                              <p:val>
+                                <p:strVal val="#ppt_h"/>
+                              </p:val>
+                            </p:tav>
+                          </p:tavLst>
+                        </p:anim>
+                      </p:childTnLst>
+                    </p:cTn>
+                  </p:par>
+                  <p:par>
+                    <p:cTn id="15" presetID="19" presetSubtype="10" presetClass="entr" nodeType="clickEffect" dur="1200" fill="hold">
+                      <p:stCondLst>
+                        <p:cond delay="0"/>
+                      </p:stCondLst>
+                      <p:childTnLst>
+                        <p:anim calcmode="lin" valueType="num">
+                          <p:cBhvr>
+                            <p:cTn id="250" dur="1200" fill="hold"/>
+                            <p:tgtEl>
+                              <p:spTgt spid="150"/>
+                            </p:tgtEl>
+                            <p:attrNameLst>
+                              <p:attrName>ppt_w</p:attrName>
+                            </p:attrNameLst>
+                          </p:cBhvr>
+                          <p:tavLst>
+                            <p:tav tm="0" fmla="#ppt_w*sin(2.5*pi*$)">
+                              <p:val>
+                                <p:fltVal val="0"/>
+                              </p:val>
+                            </p:tav>
+                            <p:tav tm="100000">
+                              <p:val>
+                                <p:fltVal val="1"/>
+                              </p:val>
+                            </p:tav>
+                          </p:tavLst>
+                        </p:anim>
+                        <p:anim calcmode="lin" valueType="num">
+                          <p:cBhvr>
+                            <p:cTn id="251" dur="1200" fill="hold"/>
+                            <p:tgtEl>
+                              <p:spTgt spid="150"/>
+                            </p:tgtEl>
+                            <p:attrNameLst>
+                              <p:attrName>ppt_h</p:attrName>
+                            </p:attrNameLst>
+                          </p:cBhvr>
+                          <p:tavLst>
+                            <p:tav tm="0">
+                              <p:val>
+                                <p:strVal val="#ppt_h"/>
+                              </p:val>
+                            </p:tav>
+                            <p:tav tm="100000">
+                              <p:val>
+                                <p:strVal val="#ppt_h"/>
+                              </p:val>
+                            </p:tav>
+                          </p:tavLst>
+                        </p:anim>
+                        <p:animEffect transition="in" filter="fade">
+                          <p:cBhvr>
+                            <p:cTn id="252" dur="1200"/>
+                            <p:tgtEl>
+                              <p:spTgt spid="150"/>
+                            </p:tgtEl>
+                          </p:cBhvr>
+                        </p:animEffect>
+                      </p:childTnLst>
+                    </p:cTn>
+                  </p:par>
+                  <p:par>
+                    <p:cTn id="16" presetID="19" presetSubtype="5" presetClass="entr" nodeType="clickEffect" dur="1200" fill="hold">
+                      <p:stCondLst>
+                        <p:cond delay="0"/>
+                      </p:stCondLst>
+                      <p:childTnLst>
+                        <p:anim calcmode="lin" valueType="num">
+                          <p:cBhvr>
+                            <p:cTn id="260" dur="1200" fill="hold"/>
+                            <p:tgtEl>
+                              <p:spTgt spid="151"/>
+                            </p:tgtEl>
+                            <p:attrNameLst>
+                              <p:attrName>ppt_h</p:attrName>
+                            </p:attrNameLst>
+                          </p:cBhvr>
+                          <p:tavLst>
+                            <p:tav tm="0" fmla="#ppt_h*sin(2.5*pi*$)">
+                              <p:val>
+                                <p:fltVal val="0"/>
+                              </p:val>
+                            </p:tav>
+                            <p:tav tm="100000">
+                              <p:val>
+                                <p:fltVal val="1"/>
+                              </p:val>
+                            </p:tav>
+                          </p:tavLst>
+                        </p:anim>
+                        <p:anim calcmode="lin" valueType="num">
+                          <p:cBhvr>
+                            <p:cTn id="261" dur="1200" fill="hold"/>
+                            <p:tgtEl>
+                              <p:spTgt spid="151"/>
+                            </p:tgtEl>
+                            <p:attrNameLst>
+                              <p:attrName>ppt_w</p:attrName>
+                            </p:attrNameLst>
+                          </p:cBhvr>
+                          <p:tavLst>
+                            <p:tav tm="0">
+                              <p:val>
+                                <p:strVal val="#ppt_w"/>
+                              </p:val>
+                            </p:tav>
+                            <p:tav tm="100000">
+                              <p:val>
+                                <p:strVal val="#ppt_w"/>
+                              </p:val>
+                            </p:tav>
+                          </p:tavLst>
+                        </p:anim>
+                        <p:animEffect transition="in" filter="fade">
+                          <p:cBhvr>
+                            <p:cTn id="262" dur="1200"/>
+                            <p:tgtEl>
+                              <p:spTgt spid="151"/>
+                            </p:tgtEl>
+                          </p:cBhvr>
+                        </p:animEffect>
+                      </p:childTnLst>
+                    </p:cTn>
+                  </p:par>
+                  <p:par>
+                    <p:cTn id="17" presetID="17" presetSubtype="4" presetClass="exit" nodeType="clickEffect" dur="1200" fill="hold">
+                      <p:stCondLst>
+                        <p:cond delay="0"/>
+                      </p:stCondLst>
+                      <p:childTnLst>
+                        <p:anim calcmode="lin" valueType="num">
+                          <p:cBhvr>
+                            <p:cTn id="270" dur="1200" fill="hold"/>
+                            <p:tgtEl>
+                              <p:spTgt spid="152"/>
+                            </p:tgtEl>
+                            <p:attrNameLst>
+                              <p:attrName>ppt_x</p:attrName>
+                            </p:attrNameLst>
+                          </p:cBhvr>
+                          <p:tavLst>
+                            <p:tav tm="0">
+                              <p:val>
+                                <p:strVal val="#ppt_x"/>
+                              </p:val>
+                            </p:tav>
+                            <p:tav tm="100000">
+                              <p:val>
+                                <p:strVal val="#ppt_x"/>
+                              </p:val>
+                            </p:tav>
+                          </p:tavLst>
+                        </p:anim>
+                        <p:anim calcmode="lin" valueType="num">
+                          <p:cBhvr>
+                            <p:cTn id="271" dur="1200" fill="hold"/>
+                            <p:tgtEl>
+                              <p:spTgt spid="152"/>
+                            </p:tgtEl>
+                            <p:attrNameLst>
+                              <p:attrName>ppt_y</p:attrName>
+                            </p:attrNameLst>
+                          </p:cBhvr>
+                          <p:tavLst>
+                            <p:tav tm="0">
+                              <p:val>
+                                <p:strVal val="#ppt_y"/>
+                              </p:val>
+                            </p:tav>
+                            <p:tav tm="100000">
+                              <p:val>
+                                <p:strVal val="#ppt_y+#ppt_h/2"/>
+                              </p:val>
+                            </p:tav>
+                          </p:tavLst>
+                        </p:anim>
+                        <p:anim calcmode="lin" valueType="num">
+                          <p:cBhvr>
+                            <p:cTn id="272" dur="1200" fill="hold"/>
+                            <p:tgtEl>
+                              <p:spTgt spid="152"/>
+                            </p:tgtEl>
+                            <p:attrNameLst>
+                              <p:attrName>ppt_w</p:attrName>
+                            </p:attrNameLst>
+                          </p:cBhvr>
+                          <p:tavLst>
+                            <p:tav tm="0">
+                              <p:val>
+                                <p:strVal val="#ppt_w"/>
+                              </p:val>
+                            </p:tav>
+                            <p:tav tm="100000">
+                              <p:val>
+                                <p:strVal val="#ppt_w"/>
+                              </p:val>
+                            </p:tav>
+                          </p:tavLst>
+                        </p:anim>
+                        <p:anim calcmode="lin" valueType="num">
+                          <p:cBhvr>
+                            <p:cTn id="273" dur="1200" fill="hold"/>
+                            <p:tgtEl>
+                              <p:spTgt spid="152"/>
+                            </p:tgtEl>
+                            <p:attrNameLst>
+                              <p:attrName>ppt_h</p:attrName>
+                            </p:attrNameLst>
+                          </p:cBhvr>
+                          <p:tavLst>
+                            <p:tav tm="0">
+                              <p:val>
+                                <p:strVal val="#ppt_h"/>
+                              </p:val>
+                            </p:tav>
+                            <p:tav tm="100000">
+                              <p:val>
+                                <p:fltVal val="0"/>
+                              </p:val>
+                            </p:tav>
+                          </p:tavLst>
+                        </p:anim>
                       </p:childTnLst>
                     </p:cTn>
                   </p:par>
